--- a/assets/powerpoints/module-nouvelles/C2-l-imparfait-du-verbe-etre.pptx
+++ b/assets/powerpoints/module-nouvelles/C2-l-imparfait-du-verbe-etre.pptx
@@ -4720,7 +4720,7 @@
                 </a:solidFill>
                 <a:latin typeface="Verdana"/>
               </a:rPr>
-              <a:t>SÉANCE C2  ·  MODULE 5</a:t>
+              <a:t>SÉANCE C2  ·  MODULE 6</a:t>
             </a:r>
           </a:p>
         </p:txBody>

--- a/assets/powerpoints/module-nouvelles/C2-l-imparfait-du-verbe-etre.pptx
+++ b/assets/powerpoints/module-nouvelles/C2-l-imparfait-du-verbe-etre.pptx
@@ -14414,7 +14414,7 @@
                 </a:solidFill>
                 <a:latin typeface="Verdana"/>
               </a:rPr>
-              <a:t>EN APPRENDRE PLUS</a:t>
+              <a:t>OUVRIR LA MINI-LEÇON</a:t>
             </a:r>
           </a:p>
         </p:txBody>
